--- a/assets/pdf/cografi_becerilerin_dijital_donusumu.pptx
+++ b/assets/pdf/cografi_becerilerin_dijital_donusumu.pptx
@@ -106,6 +106,11 @@
       </a:defRPr>
     </a:lvl9pPr>
   </p:defaultTextStyle>
+  <p:extLst>
+    <p:ext uri="{EFAFB233-063F-42B5-8137-9DF3F51BA10A}">
+      <p15:sldGuideLst xmlns:p15="http://schemas.microsoft.com/office/powerpoint/2012/main"/>
+    </p:ext>
+  </p:extLst>
 </p:presentation>
 </file>
 
@@ -260,7 +265,7 @@
           <a:p>
             <a:fld id="{C128FA71-3A18-48C0-980F-4B68F7F63042}" type="datetime1">
               <a:rPr lang="en-US" smtClean="0"/>
-              <a:t>3/11/2026</a:t>
+              <a:t>3/15/2026</a:t>
             </a:fld>
             <a:endParaRPr lang="en-US"/>
           </a:p>
@@ -499,7 +504,7 @@
           <a:p>
             <a:fld id="{67F45AC6-C491-4585-A584-9CE2AF7D5500}" type="datetime1">
               <a:rPr lang="en-US" smtClean="0"/>
-              <a:t>3/11/2026</a:t>
+              <a:t>3/15/2026</a:t>
             </a:fld>
             <a:endParaRPr lang="en-US"/>
           </a:p>
@@ -1055,7 +1060,7 @@
         </p:nvSpPr>
         <p:spPr>
           <a:xfrm>
-            <a:off x="422147" y="1057148"/>
+            <a:off x="239267" y="1053084"/>
             <a:ext cx="5396485" cy="5165852"/>
           </a:xfrm>
         </p:spPr>
@@ -1065,7 +1070,7 @@
           </a:bodyPr>
           <a:lstStyle/>
           <a:p>
-            <a:pPr algn="l">
+            <a:pPr algn="just">
               <a:lnSpc>
                 <a:spcPct val="110000"/>
               </a:lnSpc>
@@ -1160,7 +1165,7 @@
             </a:r>
           </a:p>
           <a:p>
-            <a:pPr algn="l">
+            <a:pPr algn="just">
               <a:lnSpc>
                 <a:spcPct val="110000"/>
               </a:lnSpc>
@@ -1327,7 +1332,7 @@
             </a:r>
           </a:p>
           <a:p>
-            <a:pPr algn="l">
+            <a:pPr algn="just">
               <a:lnSpc>
                 <a:spcPct val="110000"/>
               </a:lnSpc>
@@ -1670,7 +1675,7 @@
             </a:r>
           </a:p>
           <a:p>
-            <a:pPr algn="l">
+            <a:pPr algn="just">
               <a:lnSpc>
                 <a:spcPct val="110000"/>
               </a:lnSpc>
@@ -1917,7 +1922,7 @@
             </a:r>
           </a:p>
           <a:p>
-            <a:pPr algn="l">
+            <a:pPr algn="just">
               <a:lnSpc>
                 <a:spcPct val="110000"/>
               </a:lnSpc>
@@ -2219,8 +2224,8 @@
         </p:blipFill>
         <p:spPr>
           <a:xfrm>
-            <a:off x="5818632" y="-1"/>
-            <a:ext cx="6373368" cy="6858001"/>
+            <a:off x="6027422" y="224535"/>
+            <a:ext cx="5574572" cy="5998465"/>
           </a:xfrm>
           <a:prstGeom prst="rect">
             <a:avLst/>
@@ -2750,7 +2755,7 @@
         </p:nvSpPr>
         <p:spPr>
           <a:xfrm>
-            <a:off x="422147" y="1044448"/>
+            <a:off x="256984" y="888237"/>
             <a:ext cx="5673853" cy="5165852"/>
           </a:xfrm>
         </p:spPr>
@@ -2838,10 +2843,10 @@
       </p:sp>
       <p:pic>
         <p:nvPicPr>
-          <p:cNvPr id="6" name="Resim 5">
+          <p:cNvPr id="4" name="Resim 3">
             <a:extLst>
               <a:ext uri="{FF2B5EF4-FFF2-40B4-BE49-F238E27FC236}">
-                <a16:creationId xmlns:a16="http://schemas.microsoft.com/office/drawing/2014/main" id="{25117E08-5636-BFC5-9D39-AA6996A65DD9}"/>
+                <a16:creationId xmlns:a16="http://schemas.microsoft.com/office/drawing/2014/main" id="{140708D9-D21D-9D5D-0D3C-F87463F21A00}"/>
               </a:ext>
             </a:extLst>
           </p:cNvPr>
@@ -2859,8 +2864,8 @@
         </p:blipFill>
         <p:spPr>
           <a:xfrm>
-            <a:off x="5818632" y="-1"/>
-            <a:ext cx="6373368" cy="6858001"/>
+            <a:off x="6027422" y="224535"/>
+            <a:ext cx="5574572" cy="5998465"/>
           </a:xfrm>
           <a:prstGeom prst="rect">
             <a:avLst/>
@@ -3510,12 +3515,157 @@
           </a:p>
         </p:txBody>
       </p:sp>
+      <p:sp>
+        <p:nvSpPr>
+          <p:cNvPr id="3" name="Alt Başlık 2">
+            <a:extLst>
+              <a:ext uri="{FF2B5EF4-FFF2-40B4-BE49-F238E27FC236}">
+                <a16:creationId xmlns:a16="http://schemas.microsoft.com/office/drawing/2014/main" id="{3FD313D0-2DEC-1CA3-5CF2-6376A8FCDAB5}"/>
+              </a:ext>
+            </a:extLst>
+          </p:cNvPr>
+          <p:cNvSpPr>
+            <a:spLocks noGrp="1"/>
+          </p:cNvSpPr>
+          <p:nvPr>
+            <p:ph type="subTitle" idx="1"/>
+          </p:nvPr>
+        </p:nvSpPr>
+        <p:spPr>
+          <a:xfrm>
+            <a:off x="382525" y="577977"/>
+            <a:ext cx="5192048" cy="6092698"/>
+          </a:xfrm>
+        </p:spPr>
+        <p:txBody>
+          <a:bodyPr vert="horz" lIns="91440" tIns="45720" rIns="91440" bIns="45720" rtlCol="0">
+            <a:noAutofit/>
+          </a:bodyPr>
+          <a:lstStyle/>
+          <a:p>
+            <a:pPr algn="just"/>
+            <a:r>
+              <a:rPr lang="tr-TR" b="1" dirty="0"/>
+              <a:t>Nasıl Oynatılır?</a:t>
+            </a:r>
+          </a:p>
+          <a:p>
+            <a:pPr algn="l"/>
+            <a:r>
+              <a:rPr lang="tr-TR" b="1" dirty="0"/>
+              <a:t>Hazırlık:</a:t>
+            </a:r>
+            <a:r>
+              <a:rPr lang="tr-TR" dirty="0"/>
+              <a:t> Excel dosyasına sınıf listenizi kopyalayınız. Dosyadaki eşleştir düğmesine (makrolara izin vermeniz gerekir.) basarak takımları oluşturunuz. Bu listeyi </a:t>
+            </a:r>
+            <a:r>
+              <a:rPr lang="tr-TR" dirty="0" err="1"/>
+              <a:t>csv</a:t>
+            </a:r>
+            <a:r>
+              <a:rPr lang="tr-TR" dirty="0"/>
+              <a:t> formatına çevirip karargah.html ye yükleyiniz</a:t>
+            </a:r>
+            <a:br>
+              <a:rPr lang="tr-TR" dirty="0"/>
+            </a:br>
+            <a:r>
+              <a:rPr lang="tr-TR" b="1" dirty="0"/>
+              <a:t>Brifing:</a:t>
+            </a:r>
+            <a:r>
+              <a:rPr lang="tr-TR" dirty="0"/>
+              <a:t> "</a:t>
+            </a:r>
+            <a:r>
+              <a:rPr lang="tr-TR" dirty="0" err="1"/>
+              <a:t>İntro</a:t>
+            </a:r>
+            <a:r>
+              <a:rPr lang="tr-TR" dirty="0"/>
+              <a:t> </a:t>
+            </a:r>
+            <a:r>
+              <a:rPr lang="tr-TR" dirty="0" err="1"/>
+              <a:t>Video"yu</a:t>
+            </a:r>
+            <a:r>
+              <a:rPr lang="tr-TR" dirty="0"/>
+              <a:t> sınıfa izleterek hikaye </a:t>
+            </a:r>
+            <a:br>
+              <a:rPr lang="tr-TR" dirty="0"/>
+            </a:br>
+            <a:r>
+              <a:rPr lang="tr-TR" dirty="0"/>
+              <a:t>akışını başlatınız.</a:t>
+            </a:r>
+            <a:br>
+              <a:rPr lang="tr-TR" dirty="0"/>
+            </a:br>
+            <a:r>
+              <a:rPr lang="tr-TR" b="1" dirty="0"/>
+              <a:t>Görev Başına: </a:t>
+            </a:r>
+            <a:r>
+              <a:rPr lang="tr-TR" dirty="0"/>
+              <a:t>Videodan sonra takımları bilgisayar başına alınız.</a:t>
+            </a:r>
+            <a:br>
+              <a:rPr lang="tr-TR" dirty="0"/>
+            </a:br>
+            <a:r>
+              <a:rPr lang="tr-TR" b="1" dirty="0"/>
+              <a:t>Aktif Saha:</a:t>
+            </a:r>
+            <a:r>
+              <a:rPr lang="tr-TR" dirty="0"/>
+              <a:t> Öğrenciler, "Saha </a:t>
+            </a:r>
+            <a:r>
+              <a:rPr lang="tr-TR" dirty="0" err="1"/>
+              <a:t>Kılavuzu"ndaki</a:t>
+            </a:r>
+            <a:r>
+              <a:rPr lang="tr-TR" dirty="0"/>
+              <a:t> teknik bilgilerden yararlanarak 10 kritik görevi tamamlatınız.</a:t>
+            </a:r>
+          </a:p>
+          <a:p>
+            <a:pPr algn="just"/>
+            <a:r>
+              <a:rPr lang="tr-TR" b="1" dirty="0"/>
+              <a:t>Değerlendirme:</a:t>
+            </a:r>
+            <a:r>
+              <a:rPr lang="tr-TR" dirty="0"/>
+              <a:t> karargah.html üzerinden gelen anlık verilerle sınıf başarısını analiz ediniz ve "Görev Sonu Raporu" ile süreci taçlandırınız.</a:t>
+            </a:r>
+            <a:br>
+              <a:rPr lang="tr-TR" dirty="0"/>
+            </a:br>
+            <a:r>
+              <a:rPr lang="tr-TR" b="1" dirty="0"/>
+              <a:t>NOT: </a:t>
+            </a:r>
+            <a:r>
+              <a:rPr lang="tr-TR" dirty="0" err="1"/>
+              <a:t>YEĞİTEK’in</a:t>
+            </a:r>
+            <a:r>
+              <a:rPr lang="tr-TR" dirty="0"/>
+              <a:t>  Yenilikçi Sınıfları için hazırlanmıştır.</a:t>
+            </a:r>
+          </a:p>
+        </p:txBody>
+      </p:sp>
       <p:pic>
         <p:nvPicPr>
-          <p:cNvPr id="6" name="Resim 5">
+          <p:cNvPr id="4" name="Resim 3">
             <a:extLst>
               <a:ext uri="{FF2B5EF4-FFF2-40B4-BE49-F238E27FC236}">
-                <a16:creationId xmlns:a16="http://schemas.microsoft.com/office/drawing/2014/main" id="{AF0A1BD1-7211-F7F7-25E8-4A4CDFCFBA10}"/>
+                <a16:creationId xmlns:a16="http://schemas.microsoft.com/office/drawing/2014/main" id="{7C2DD7EA-B0DE-5E3E-DC6B-EB7C861FECFB}"/>
               </a:ext>
             </a:extLst>
           </p:cNvPr>
@@ -3533,8 +3683,8 @@
         </p:blipFill>
         <p:spPr>
           <a:xfrm>
-            <a:off x="6553074" y="331851"/>
-            <a:ext cx="5308600" cy="5712267"/>
+            <a:off x="6096000" y="195833"/>
+            <a:ext cx="5574572" cy="5998465"/>
           </a:xfrm>
           <a:prstGeom prst="rect">
             <a:avLst/>
@@ -3553,147 +3703,6 @@
           </a:sp3d>
         </p:spPr>
       </p:pic>
-      <p:sp>
-        <p:nvSpPr>
-          <p:cNvPr id="3" name="Alt Başlık 2">
-            <a:extLst>
-              <a:ext uri="{FF2B5EF4-FFF2-40B4-BE49-F238E27FC236}">
-                <a16:creationId xmlns:a16="http://schemas.microsoft.com/office/drawing/2014/main" id="{3FD313D0-2DEC-1CA3-5CF2-6376A8FCDAB5}"/>
-              </a:ext>
-            </a:extLst>
-          </p:cNvPr>
-          <p:cNvSpPr>
-            <a:spLocks noGrp="1"/>
-          </p:cNvSpPr>
-          <p:nvPr>
-            <p:ph type="subTitle" idx="1"/>
-          </p:nvPr>
-        </p:nvSpPr>
-        <p:spPr>
-          <a:xfrm>
-            <a:off x="422147" y="663702"/>
-            <a:ext cx="6130927" cy="6092698"/>
-          </a:xfrm>
-        </p:spPr>
-        <p:txBody>
-          <a:bodyPr vert="horz" lIns="91440" tIns="45720" rIns="91440" bIns="45720" rtlCol="0">
-            <a:noAutofit/>
-          </a:bodyPr>
-          <a:lstStyle/>
-          <a:p>
-            <a:r>
-              <a:rPr lang="tr-TR" b="1" dirty="0"/>
-              <a:t>Nasıl Oynatılır?</a:t>
-            </a:r>
-          </a:p>
-          <a:p>
-            <a:pPr algn="l"/>
-            <a:r>
-              <a:rPr lang="tr-TR" b="1" dirty="0"/>
-              <a:t>Hazırlık:</a:t>
-            </a:r>
-            <a:r>
-              <a:rPr lang="tr-TR" dirty="0"/>
-              <a:t> Excel dosyasına sınıf listenizi kopyalayınız. Dosyadaki eşleştir düğmesine (makrolara izin vermeniz gerekir.) basarak takımları oluşturunuz. Bu listeyi </a:t>
-            </a:r>
-            <a:r>
-              <a:rPr lang="tr-TR" dirty="0" err="1"/>
-              <a:t>csv</a:t>
-            </a:r>
-            <a:r>
-              <a:rPr lang="tr-TR" dirty="0"/>
-              <a:t> formatına çevirip karargah.html ye yükleyiniz</a:t>
-            </a:r>
-            <a:br>
-              <a:rPr lang="tr-TR" dirty="0"/>
-            </a:br>
-            <a:r>
-              <a:rPr lang="tr-TR" b="1" dirty="0"/>
-              <a:t>Brifing:</a:t>
-            </a:r>
-            <a:r>
-              <a:rPr lang="tr-TR" dirty="0"/>
-              <a:t> "</a:t>
-            </a:r>
-            <a:r>
-              <a:rPr lang="tr-TR" dirty="0" err="1"/>
-              <a:t>İntro</a:t>
-            </a:r>
-            <a:r>
-              <a:rPr lang="tr-TR" dirty="0"/>
-              <a:t> </a:t>
-            </a:r>
-            <a:r>
-              <a:rPr lang="tr-TR" dirty="0" err="1"/>
-              <a:t>Video"yu</a:t>
-            </a:r>
-            <a:r>
-              <a:rPr lang="tr-TR" dirty="0"/>
-              <a:t> sınıfa izleterek hikaye akışını başlatınız.</a:t>
-            </a:r>
-            <a:br>
-              <a:rPr lang="tr-TR" dirty="0"/>
-            </a:br>
-            <a:r>
-              <a:rPr lang="tr-TR" dirty="0"/>
-              <a:t>Görev Başına: Videodan sonra takımları bilgisayar başına alınız.</a:t>
-            </a:r>
-            <a:br>
-              <a:rPr lang="tr-TR" dirty="0"/>
-            </a:br>
-            <a:r>
-              <a:rPr lang="tr-TR" b="1" dirty="0"/>
-              <a:t>Aktif Saha:</a:t>
-            </a:r>
-            <a:r>
-              <a:rPr lang="tr-TR" dirty="0"/>
-              <a:t> Öğrenciler, "Saha </a:t>
-            </a:r>
-            <a:r>
-              <a:rPr lang="tr-TR" dirty="0" err="1"/>
-              <a:t>Kılavuzu"ndaki</a:t>
-            </a:r>
-            <a:r>
-              <a:rPr lang="tr-TR" dirty="0"/>
-              <a:t> teknik bilgilerden yararlanarak 10 kritik görevi tamamlar.</a:t>
-            </a:r>
-          </a:p>
-          <a:p>
-            <a:pPr algn="l"/>
-            <a:r>
-              <a:rPr lang="tr-TR" b="1" dirty="0"/>
-              <a:t>Değerlendirme:</a:t>
-            </a:r>
-            <a:r>
-              <a:rPr lang="tr-TR" dirty="0"/>
-              <a:t> </a:t>
-            </a:r>
-            <a:r>
-              <a:rPr lang="tr-TR" dirty="0" err="1"/>
-              <a:t>Firebase</a:t>
-            </a:r>
-            <a:r>
-              <a:rPr lang="tr-TR" dirty="0"/>
-              <a:t> üzerinden gelen anlık verilerle sınıf başarısını analiz ediniz ve "Görev Sonu Raporu" ile süreci taçlandırınız.</a:t>
-            </a:r>
-            <a:br>
-              <a:rPr lang="tr-TR" dirty="0"/>
-            </a:br>
-            <a:r>
-              <a:rPr lang="tr-TR" b="1" dirty="0"/>
-              <a:t>NOT: </a:t>
-            </a:r>
-            <a:r>
-              <a:rPr lang="tr-TR" dirty="0" err="1"/>
-              <a:t>YEĞİTEK’in</a:t>
-            </a:r>
-            <a:r>
-              <a:rPr lang="tr-TR" dirty="0"/>
-              <a:t>  Yenilikçi Sınıfları için hazırlanmıştır.</a:t>
-            </a:r>
-          </a:p>
-        </p:txBody>
-      </p:sp>
     </p:spTree>
     <p:extLst>
       <p:ext uri="{BB962C8B-B14F-4D97-AF65-F5344CB8AC3E}">

--- a/assets/pdf/cografi_becerilerin_dijital_donusumu.pptx
+++ b/assets/pdf/cografi_becerilerin_dijital_donusumu.pptx
@@ -265,7 +265,7 @@
           <a:p>
             <a:fld id="{C128FA71-3A18-48C0-980F-4B68F7F63042}" type="datetime1">
               <a:rPr lang="en-US" smtClean="0"/>
-              <a:t>3/15/2026</a:t>
+              <a:t>3/24/2026</a:t>
             </a:fld>
             <a:endParaRPr lang="en-US"/>
           </a:p>
@@ -504,7 +504,7 @@
           <a:p>
             <a:fld id="{67F45AC6-C491-4585-A584-9CE2AF7D5500}" type="datetime1">
               <a:rPr lang="en-US" smtClean="0"/>
-              <a:t>3/15/2026</a:t>
+              <a:t>3/24/2026</a:t>
             </a:fld>
             <a:endParaRPr lang="en-US"/>
           </a:p>
@@ -2175,29 +2175,26 @@
               <a:t>akışına</a:t>
             </a:r>
             <a:r>
-              <a:rPr lang="en-US" dirty="0">
-                <a:latin typeface="Calibri" panose="020F0502020204030204" pitchFamily="34" charset="0"/>
-                <a:ea typeface="Calibri" panose="020F0502020204030204" pitchFamily="34" charset="0"/>
-                <a:cs typeface="Calibri" panose="020F0502020204030204" pitchFamily="34" charset="0"/>
-              </a:rPr>
-              <a:t> </a:t>
-            </a:r>
-            <a:r>
-              <a:rPr lang="en-US" dirty="0" err="1">
-                <a:latin typeface="Calibri" panose="020F0502020204030204" pitchFamily="34" charset="0"/>
-                <a:ea typeface="Calibri" panose="020F0502020204030204" pitchFamily="34" charset="0"/>
-                <a:cs typeface="Calibri" panose="020F0502020204030204" pitchFamily="34" charset="0"/>
-              </a:rPr>
-              <a:t>yedirilmiştir</a:t>
-            </a:r>
-            <a:r>
-              <a:rPr lang="en-US" dirty="0">
+              <a:rPr lang="tr-TR">
+                <a:latin typeface="Calibri" panose="020F0502020204030204" pitchFamily="34" charset="0"/>
+                <a:ea typeface="Calibri" panose="020F0502020204030204" pitchFamily="34" charset="0"/>
+                <a:cs typeface="Calibri" panose="020F0502020204030204" pitchFamily="34" charset="0"/>
+              </a:rPr>
+              <a:t> eklenmiştir</a:t>
+            </a:r>
+            <a:r>
+              <a:rPr lang="en-US">
                 <a:latin typeface="Calibri" panose="020F0502020204030204" pitchFamily="34" charset="0"/>
                 <a:ea typeface="Calibri" panose="020F0502020204030204" pitchFamily="34" charset="0"/>
                 <a:cs typeface="Calibri" panose="020F0502020204030204" pitchFamily="34" charset="0"/>
               </a:rPr>
               <a:t>.</a:t>
             </a:r>
+            <a:endParaRPr lang="en-US" dirty="0">
+              <a:latin typeface="Calibri" panose="020F0502020204030204" pitchFamily="34" charset="0"/>
+              <a:ea typeface="Calibri" panose="020F0502020204030204" pitchFamily="34" charset="0"/>
+              <a:cs typeface="Calibri" panose="020F0502020204030204" pitchFamily="34" charset="0"/>
+            </a:endParaRPr>
           </a:p>
         </p:txBody>
       </p:sp>

--- a/assets/pdf/cografi_becerilerin_dijital_donusumu.pptx
+++ b/assets/pdf/cografi_becerilerin_dijital_donusumu.pptx
@@ -3531,7 +3531,7 @@
         <p:spPr>
           <a:xfrm>
             <a:off x="382525" y="577977"/>
-            <a:ext cx="5192048" cy="6092698"/>
+            <a:ext cx="5192047" cy="6092698"/>
           </a:xfrm>
         </p:spPr>
         <p:txBody>
@@ -3557,7 +3557,9 @@
               <a:t> Excel dosyasına sınıf listenizi kopyalayınız. Dosyadaki eşleştir düğmesine (makrolara izin vermeniz gerekir.) basarak takımları oluşturunuz. Bu listeyi </a:t>
             </a:r>
             <a:r>
-              <a:rPr lang="tr-TR" dirty="0" err="1"/>
+              <a:rPr lang="tr-TR" dirty="0" err="1">
+                <a:hlinkClick r:id="rId2"/>
+              </a:rPr>
               <a:t>csv</a:t>
             </a:r>
             <a:r>
@@ -3613,20 +3615,16 @@
               <a:rPr lang="tr-TR" dirty="0"/>
             </a:br>
             <a:r>
-              <a:rPr lang="tr-TR" b="1" dirty="0"/>
-              <a:t>Aktif Saha:</a:t>
-            </a:r>
-            <a:r>
               <a:rPr lang="tr-TR" dirty="0"/>
-              <a:t> Öğrenciler, "Saha </a:t>
+              <a:t>Öğrencilerin, "Saha Kılavuzu'ndaki </a:t>
             </a:r>
             <a:r>
               <a:rPr lang="tr-TR" dirty="0" err="1"/>
-              <a:t>Kılavuzu"ndaki</a:t>
+              <a:t>izohipler</a:t>
             </a:r>
             <a:r>
               <a:rPr lang="tr-TR" dirty="0"/>
-              <a:t> teknik bilgilerden yararlanarak 10 kritik görevi tamamlatınız.</a:t>
+              <a:t> ile ilgili bilgilerden yararlanarak 10 kritik görevi bitirmesini sağlayınız.</a:t>
             </a:r>
           </a:p>
           <a:p>
@@ -3672,7 +3670,7 @@
           <p:nvPr/>
         </p:nvPicPr>
         <p:blipFill>
-          <a:blip r:embed="rId2"/>
+          <a:blip r:embed="rId3"/>
           <a:srcRect l="22934" r="22932" b="-2"/>
           <a:stretch>
             <a:fillRect/>
